--- a/Lesson_development/Presentations/technical_api.pptx
+++ b/Lesson_development/Presentations/technical_api.pptx
@@ -9,7 +9,7 @@
   </p:notesMasterIdLst>
   <p:sldIdLst>
     <p:sldId id="313" r:id="rId2"/>
-    <p:sldId id="314" r:id="rId3"/>
+    <p:sldId id="334" r:id="rId3"/>
     <p:sldId id="315" r:id="rId4"/>
     <p:sldId id="328" r:id="rId5"/>
     <p:sldId id="267" r:id="rId6"/>
@@ -142,7 +142,7 @@
 <file path=ppt/revisionInfo.xml><?xml version="1.0" encoding="utf-8"?>
 <p1510:revInfo xmlns:a="http://schemas.openxmlformats.org/drawingml/2006/main" xmlns:r="http://schemas.openxmlformats.org/officeDocument/2006/relationships" xmlns:p1510="http://schemas.microsoft.com/office/powerpoint/2015/10/main">
   <p1510:revLst>
-    <p1510:client id="{E72A9154-986D-4659-A96A-4533BE1008C6}" v="907" dt="2026-09-09T09:02:24.425"/>
+    <p1510:client id="{E72A9154-986D-4659-A96A-4533BE1008C6}" v="909" dt="2026-09-23T08:18:31.429"/>
   </p1510:revLst>
 </p1510:revInfo>
 </file>
@@ -152,7 +152,7 @@
   <pc:docChgLst>
     <pc:chgData name="Leila Iñigo de la Cruz" userId="fae4ed0d-52e1-4e8b-ac73-77e0b7235c9a" providerId="ADAL" clId="{1E9E03C1-E5D4-4BEC-8EBD-C4DD5262B379}"/>
     <pc:docChg chg="undo custSel addSld delSld modSld sldOrd modMainMaster">
-      <pc:chgData name="Leila Iñigo de la Cruz" userId="fae4ed0d-52e1-4e8b-ac73-77e0b7235c9a" providerId="ADAL" clId="{1E9E03C1-E5D4-4BEC-8EBD-C4DD5262B379}" dt="2026-09-09T09:04:22.911" v="5119" actId="2696"/>
+      <pc:chgData name="Leila Iñigo de la Cruz" userId="fae4ed0d-52e1-4e8b-ac73-77e0b7235c9a" providerId="ADAL" clId="{1E9E03C1-E5D4-4BEC-8EBD-C4DD5262B379}" dt="2026-09-23T08:18:37.589" v="5123" actId="1076"/>
       <pc:docMkLst>
         <pc:docMk/>
       </pc:docMkLst>
@@ -162,14 +162,6 @@
           <pc:docMk/>
           <pc:sldMk cId="2454315605" sldId="267"/>
         </pc:sldMkLst>
-        <pc:spChg chg="add del mod">
-          <ac:chgData name="Leila Iñigo de la Cruz" userId="fae4ed0d-52e1-4e8b-ac73-77e0b7235c9a" providerId="ADAL" clId="{1E9E03C1-E5D4-4BEC-8EBD-C4DD5262B379}" dt="2026-09-09T07:42:54.020" v="3898" actId="478"/>
-          <ac:spMkLst>
-            <pc:docMk/>
-            <pc:sldMk cId="2454315605" sldId="267"/>
-            <ac:spMk id="3" creationId="{02205521-92CF-3BA7-1DA4-7AF8BAD32997}"/>
-          </ac:spMkLst>
-        </pc:spChg>
         <pc:spChg chg="mod">
           <ac:chgData name="Leila Iñigo de la Cruz" userId="fae4ed0d-52e1-4e8b-ac73-77e0b7235c9a" providerId="ADAL" clId="{1E9E03C1-E5D4-4BEC-8EBD-C4DD5262B379}" dt="2026-09-09T07:48:49.768" v="4103" actId="1076"/>
           <ac:spMkLst>
@@ -232,60 +224,12 @@
           <pc:docMk/>
           <pc:sldMk cId="2808253577" sldId="269"/>
         </pc:sldMkLst>
-        <pc:spChg chg="del mod">
-          <ac:chgData name="Leila Iñigo de la Cruz" userId="fae4ed0d-52e1-4e8b-ac73-77e0b7235c9a" providerId="ADAL" clId="{1E9E03C1-E5D4-4BEC-8EBD-C4DD5262B379}" dt="2026-09-09T08:06:26.532" v="4531" actId="478"/>
-          <ac:spMkLst>
-            <pc:docMk/>
-            <pc:sldMk cId="2808253577" sldId="269"/>
-            <ac:spMk id="3" creationId="{A6B10454-D7E3-B8E6-8F9C-0E98E449626E}"/>
-          </ac:spMkLst>
-        </pc:spChg>
         <pc:spChg chg="add mod">
           <ac:chgData name="Leila Iñigo de la Cruz" userId="fae4ed0d-52e1-4e8b-ac73-77e0b7235c9a" providerId="ADAL" clId="{1E9E03C1-E5D4-4BEC-8EBD-C4DD5262B379}" dt="2026-09-09T08:11:31.731" v="4571" actId="1076"/>
           <ac:spMkLst>
             <pc:docMk/>
             <pc:sldMk cId="2808253577" sldId="269"/>
             <ac:spMk id="6" creationId="{FC845CE0-1161-51DD-F7AB-4EF7139F10DF}"/>
-          </ac:spMkLst>
-        </pc:spChg>
-        <pc:spChg chg="add del mod">
-          <ac:chgData name="Leila Iñigo de la Cruz" userId="fae4ed0d-52e1-4e8b-ac73-77e0b7235c9a" providerId="ADAL" clId="{1E9E03C1-E5D4-4BEC-8EBD-C4DD5262B379}" dt="2026-09-09T08:12:07.071" v="4575" actId="478"/>
-          <ac:spMkLst>
-            <pc:docMk/>
-            <pc:sldMk cId="2808253577" sldId="269"/>
-            <ac:spMk id="7" creationId="{B8B4FEB2-A4B7-FE23-B481-7A9BC2FC885F}"/>
-          </ac:spMkLst>
-        </pc:spChg>
-        <pc:spChg chg="add del mod">
-          <ac:chgData name="Leila Iñigo de la Cruz" userId="fae4ed0d-52e1-4e8b-ac73-77e0b7235c9a" providerId="ADAL" clId="{1E9E03C1-E5D4-4BEC-8EBD-C4DD5262B379}" dt="2026-09-09T08:12:08.068" v="4576" actId="478"/>
-          <ac:spMkLst>
-            <pc:docMk/>
-            <pc:sldMk cId="2808253577" sldId="269"/>
-            <ac:spMk id="8" creationId="{4A9314EC-194D-6155-3833-50292A2877AA}"/>
-          </ac:spMkLst>
-        </pc:spChg>
-        <pc:spChg chg="add del mod">
-          <ac:chgData name="Leila Iñigo de la Cruz" userId="fae4ed0d-52e1-4e8b-ac73-77e0b7235c9a" providerId="ADAL" clId="{1E9E03C1-E5D4-4BEC-8EBD-C4DD5262B379}" dt="2026-09-09T08:12:08.371" v="4577" actId="478"/>
-          <ac:spMkLst>
-            <pc:docMk/>
-            <pc:sldMk cId="2808253577" sldId="269"/>
-            <ac:spMk id="9" creationId="{33D884E8-71CA-CDD2-439B-988890B7E084}"/>
-          </ac:spMkLst>
-        </pc:spChg>
-        <pc:spChg chg="add del mod">
-          <ac:chgData name="Leila Iñigo de la Cruz" userId="fae4ed0d-52e1-4e8b-ac73-77e0b7235c9a" providerId="ADAL" clId="{1E9E03C1-E5D4-4BEC-8EBD-C4DD5262B379}" dt="2026-09-09T08:12:08.898" v="4578" actId="478"/>
-          <ac:spMkLst>
-            <pc:docMk/>
-            <pc:sldMk cId="2808253577" sldId="269"/>
-            <ac:spMk id="10" creationId="{621384AD-F522-439C-7089-80899031865B}"/>
-          </ac:spMkLst>
-        </pc:spChg>
-        <pc:spChg chg="add del mod">
-          <ac:chgData name="Leila Iñigo de la Cruz" userId="fae4ed0d-52e1-4e8b-ac73-77e0b7235c9a" providerId="ADAL" clId="{1E9E03C1-E5D4-4BEC-8EBD-C4DD5262B379}" dt="2026-09-09T08:12:09.943" v="4579" actId="478"/>
-          <ac:spMkLst>
-            <pc:docMk/>
-            <pc:sldMk cId="2808253577" sldId="269"/>
-            <ac:spMk id="11" creationId="{43784F7D-EBB8-B7F9-1E71-AB7518871CDE}"/>
           </ac:spMkLst>
         </pc:spChg>
         <pc:spChg chg="mod">
@@ -366,93 +310,6 @@
             <ac:spMk id="7" creationId="{70D7D45D-0004-824B-3680-7A71FEC97B3F}"/>
           </ac:spMkLst>
         </pc:spChg>
-        <pc:spChg chg="del mod">
-          <ac:chgData name="Leila Iñigo de la Cruz" userId="fae4ed0d-52e1-4e8b-ac73-77e0b7235c9a" providerId="ADAL" clId="{1E9E03C1-E5D4-4BEC-8EBD-C4DD5262B379}" dt="2026-09-09T08:20:40.210" v="4931" actId="478"/>
-          <ac:spMkLst>
-            <pc:docMk/>
-            <pc:sldMk cId="633398990" sldId="271"/>
-            <ac:spMk id="159" creationId="{94085A62-5F8C-0F63-8581-810207271EFE}"/>
-          </ac:spMkLst>
-        </pc:spChg>
-        <pc:spChg chg="del">
-          <ac:chgData name="Leila Iñigo de la Cruz" userId="fae4ed0d-52e1-4e8b-ac73-77e0b7235c9a" providerId="ADAL" clId="{1E9E03C1-E5D4-4BEC-8EBD-C4DD5262B379}" dt="2026-09-09T08:20:43.441" v="4934" actId="478"/>
-          <ac:spMkLst>
-            <pc:docMk/>
-            <pc:sldMk cId="633398990" sldId="271"/>
-            <ac:spMk id="160" creationId="{38CBFF38-B9C3-8422-1080-4DA7325C6B98}"/>
-          </ac:spMkLst>
-        </pc:spChg>
-        <pc:grpChg chg="del mod">
-          <ac:chgData name="Leila Iñigo de la Cruz" userId="fae4ed0d-52e1-4e8b-ac73-77e0b7235c9a" providerId="ADAL" clId="{1E9E03C1-E5D4-4BEC-8EBD-C4DD5262B379}" dt="2026-09-09T08:20:41.515" v="4932" actId="478"/>
-          <ac:grpSpMkLst>
-            <pc:docMk/>
-            <pc:sldMk cId="633398990" sldId="271"/>
-            <ac:grpSpMk id="4" creationId="{603500DA-A41A-D067-7A48-DCC596C396C7}"/>
-          </ac:grpSpMkLst>
-        </pc:grpChg>
-        <pc:grpChg chg="del">
-          <ac:chgData name="Leila Iñigo de la Cruz" userId="fae4ed0d-52e1-4e8b-ac73-77e0b7235c9a" providerId="ADAL" clId="{1E9E03C1-E5D4-4BEC-8EBD-C4DD5262B379}" dt="2026-09-09T08:20:42.596" v="4933" actId="478"/>
-          <ac:grpSpMkLst>
-            <pc:docMk/>
-            <pc:sldMk cId="633398990" sldId="271"/>
-            <ac:grpSpMk id="161" creationId="{D5191EF2-CED4-48AF-DF6E-570F82ED3965}"/>
-          </ac:grpSpMkLst>
-        </pc:grpChg>
-      </pc:sldChg>
-      <pc:sldChg chg="delSp modSp add del mod setBg">
-        <pc:chgData name="Leila Iñigo de la Cruz" userId="fae4ed0d-52e1-4e8b-ac73-77e0b7235c9a" providerId="ADAL" clId="{1E9E03C1-E5D4-4BEC-8EBD-C4DD5262B379}" dt="2026-09-09T09:03:05.303" v="5111" actId="2696"/>
-        <pc:sldMkLst>
-          <pc:docMk/>
-          <pc:sldMk cId="3284238671" sldId="272"/>
-        </pc:sldMkLst>
-        <pc:spChg chg="del mod">
-          <ac:chgData name="Leila Iñigo de la Cruz" userId="fae4ed0d-52e1-4e8b-ac73-77e0b7235c9a" providerId="ADAL" clId="{1E9E03C1-E5D4-4BEC-8EBD-C4DD5262B379}" dt="2026-09-09T07:00:51.411" v="3525" actId="478"/>
-          <ac:spMkLst>
-            <pc:docMk/>
-            <pc:sldMk cId="3284238671" sldId="272"/>
-            <ac:spMk id="2" creationId="{070B02D6-32F1-0540-4350-3516BAD93CA8}"/>
-          </ac:spMkLst>
-        </pc:spChg>
-        <pc:spChg chg="mod">
-          <ac:chgData name="Leila Iñigo de la Cruz" userId="fae4ed0d-52e1-4e8b-ac73-77e0b7235c9a" providerId="ADAL" clId="{1E9E03C1-E5D4-4BEC-8EBD-C4DD5262B379}" dt="2026-09-09T07:00:43.301" v="3522" actId="207"/>
-          <ac:spMkLst>
-            <pc:docMk/>
-            <pc:sldMk cId="3284238671" sldId="272"/>
-            <ac:spMk id="3" creationId="{B4B3B3B9-4438-0B45-07B6-BBBA55CAA402}"/>
-          </ac:spMkLst>
-        </pc:spChg>
-        <pc:spChg chg="mod">
-          <ac:chgData name="Leila Iñigo de la Cruz" userId="fae4ed0d-52e1-4e8b-ac73-77e0b7235c9a" providerId="ADAL" clId="{1E9E03C1-E5D4-4BEC-8EBD-C4DD5262B379}" dt="2026-09-09T07:01:15.333" v="3535" actId="403"/>
-          <ac:spMkLst>
-            <pc:docMk/>
-            <pc:sldMk cId="3284238671" sldId="272"/>
-            <ac:spMk id="4" creationId="{5DE4D6D2-B9F5-7944-9E35-ED973990553D}"/>
-          </ac:spMkLst>
-        </pc:spChg>
-        <pc:spChg chg="del">
-          <ac:chgData name="Leila Iñigo de la Cruz" userId="fae4ed0d-52e1-4e8b-ac73-77e0b7235c9a" providerId="ADAL" clId="{1E9E03C1-E5D4-4BEC-8EBD-C4DD5262B379}" dt="2026-09-09T07:00:48.240" v="3523" actId="478"/>
-          <ac:spMkLst>
-            <pc:docMk/>
-            <pc:sldMk cId="3284238671" sldId="272"/>
-            <ac:spMk id="7" creationId="{3B680B53-BB33-1C54-8CD8-A66CC4317D2A}"/>
-          </ac:spMkLst>
-        </pc:spChg>
-        <pc:spChg chg="mod">
-          <ac:chgData name="Leila Iñigo de la Cruz" userId="fae4ed0d-52e1-4e8b-ac73-77e0b7235c9a" providerId="ADAL" clId="{1E9E03C1-E5D4-4BEC-8EBD-C4DD5262B379}" dt="2026-09-09T07:00:43.301" v="3522" actId="207"/>
-          <ac:spMkLst>
-            <pc:docMk/>
-            <pc:sldMk cId="3284238671" sldId="272"/>
-            <ac:spMk id="159" creationId="{F347473E-8E6C-F987-D1E2-0D09D1CFA8A3}"/>
-          </ac:spMkLst>
-        </pc:spChg>
-        <pc:picChg chg="del">
-          <ac:chgData name="Leila Iñigo de la Cruz" userId="fae4ed0d-52e1-4e8b-ac73-77e0b7235c9a" providerId="ADAL" clId="{1E9E03C1-E5D4-4BEC-8EBD-C4DD5262B379}" dt="2026-09-09T07:00:52.282" v="3526" actId="478"/>
-          <ac:picMkLst>
-            <pc:docMk/>
-            <pc:sldMk cId="3284238671" sldId="272"/>
-            <ac:picMk id="6" creationId="{C9224925-8506-4839-17EB-1D182A8349AD}"/>
-          </ac:picMkLst>
-        </pc:picChg>
       </pc:sldChg>
       <pc:sldChg chg="modSp mod setBg">
         <pc:chgData name="Leila Iñigo de la Cruz" userId="fae4ed0d-52e1-4e8b-ac73-77e0b7235c9a" providerId="ADAL" clId="{1E9E03C1-E5D4-4BEC-8EBD-C4DD5262B379}" dt="2026-09-09T07:00:09.510" v="3517"/>
@@ -469,36 +326,12 @@
           </ac:spMkLst>
         </pc:spChg>
       </pc:sldChg>
-      <pc:sldChg chg="addSp delSp modSp mod setBg">
-        <pc:chgData name="Leila Iñigo de la Cruz" userId="fae4ed0d-52e1-4e8b-ac73-77e0b7235c9a" providerId="ADAL" clId="{1E9E03C1-E5D4-4BEC-8EBD-C4DD5262B379}" dt="2026-09-09T08:07:04.348" v="4536" actId="1076"/>
+      <pc:sldChg chg="addSp delSp modSp del mod setBg">
+        <pc:chgData name="Leila Iñigo de la Cruz" userId="fae4ed0d-52e1-4e8b-ac73-77e0b7235c9a" providerId="ADAL" clId="{1E9E03C1-E5D4-4BEC-8EBD-C4DD5262B379}" dt="2026-09-23T08:18:07.049" v="5121" actId="47"/>
         <pc:sldMkLst>
           <pc:docMk/>
           <pc:sldMk cId="3544987058" sldId="314"/>
         </pc:sldMkLst>
-        <pc:spChg chg="add del mod topLvl">
-          <ac:chgData name="Leila Iñigo de la Cruz" userId="fae4ed0d-52e1-4e8b-ac73-77e0b7235c9a" providerId="ADAL" clId="{1E9E03C1-E5D4-4BEC-8EBD-C4DD5262B379}" dt="2026-09-02T11:59:27.765" v="1858" actId="207"/>
-          <ac:spMkLst>
-            <pc:docMk/>
-            <pc:sldMk cId="3544987058" sldId="314"/>
-            <ac:spMk id="19" creationId="{0BF0829E-5109-8079-C23E-A427500F4FD4}"/>
-          </ac:spMkLst>
-        </pc:spChg>
-        <pc:grpChg chg="add del mod">
-          <ac:chgData name="Leila Iñigo de la Cruz" userId="fae4ed0d-52e1-4e8b-ac73-77e0b7235c9a" providerId="ADAL" clId="{1E9E03C1-E5D4-4BEC-8EBD-C4DD5262B379}" dt="2026-09-09T08:07:04.348" v="4536" actId="1076"/>
-          <ac:grpSpMkLst>
-            <pc:docMk/>
-            <pc:sldMk cId="3544987058" sldId="314"/>
-            <ac:grpSpMk id="21" creationId="{B8F2B41B-D5B1-4562-C498-EEEE1A392D4D}"/>
-          </ac:grpSpMkLst>
-        </pc:grpChg>
-        <pc:picChg chg="mod topLvl">
-          <ac:chgData name="Leila Iñigo de la Cruz" userId="fae4ed0d-52e1-4e8b-ac73-77e0b7235c9a" providerId="ADAL" clId="{1E9E03C1-E5D4-4BEC-8EBD-C4DD5262B379}" dt="2026-09-02T07:11:38.782" v="32" actId="478"/>
-          <ac:picMkLst>
-            <pc:docMk/>
-            <pc:sldMk cId="3544987058" sldId="314"/>
-            <ac:picMk id="18" creationId="{5706CBD8-3757-C205-AAD8-D4E17F88EE20}"/>
-          </ac:picMkLst>
-        </pc:picChg>
       </pc:sldChg>
       <pc:sldChg chg="addSp delSp modSp mod setBg delAnim modAnim modNotesTx">
         <pc:chgData name="Leila Iñigo de la Cruz" userId="fae4ed0d-52e1-4e8b-ac73-77e0b7235c9a" providerId="ADAL" clId="{1E9E03C1-E5D4-4BEC-8EBD-C4DD5262B379}" dt="2026-09-09T07:15:14.488" v="3693" actId="478"/>
@@ -512,14 +345,6 @@
             <pc:docMk/>
             <pc:sldMk cId="2570287448" sldId="315"/>
             <ac:spMk id="2" creationId="{A66FE9C8-7F4E-1525-3ABA-7FE266D29972}"/>
-          </ac:spMkLst>
-        </pc:spChg>
-        <pc:spChg chg="add del mod">
-          <ac:chgData name="Leila Iñigo de la Cruz" userId="fae4ed0d-52e1-4e8b-ac73-77e0b7235c9a" providerId="ADAL" clId="{1E9E03C1-E5D4-4BEC-8EBD-C4DD5262B379}" dt="2026-09-09T07:15:14.488" v="3693" actId="478"/>
-          <ac:spMkLst>
-            <pc:docMk/>
-            <pc:sldMk cId="2570287448" sldId="315"/>
-            <ac:spMk id="3" creationId="{07C4F1B4-ACEF-46CA-822C-FE544DA469D0}"/>
           </ac:spMkLst>
         </pc:spChg>
         <pc:spChg chg="mod">
@@ -538,36 +363,12 @@
             <ac:spMk id="7" creationId="{B0FF7A36-9E59-D9C5-CADA-9EC3FBF99F9C}"/>
           </ac:spMkLst>
         </pc:spChg>
-        <pc:spChg chg="add del mod">
-          <ac:chgData name="Leila Iñigo de la Cruz" userId="fae4ed0d-52e1-4e8b-ac73-77e0b7235c9a" providerId="ADAL" clId="{1E9E03C1-E5D4-4BEC-8EBD-C4DD5262B379}" dt="2026-09-09T07:15:14.488" v="3693" actId="478"/>
-          <ac:spMkLst>
-            <pc:docMk/>
-            <pc:sldMk cId="2570287448" sldId="315"/>
-            <ac:spMk id="12" creationId="{4E931113-5450-8731-7E15-B1A16AC60044}"/>
-          </ac:spMkLst>
-        </pc:spChg>
         <pc:cxnChg chg="add mod">
           <ac:chgData name="Leila Iñigo de la Cruz" userId="fae4ed0d-52e1-4e8b-ac73-77e0b7235c9a" providerId="ADAL" clId="{1E9E03C1-E5D4-4BEC-8EBD-C4DD5262B379}" dt="2026-09-09T07:04:25.198" v="3645" actId="13822"/>
           <ac:cxnSpMkLst>
             <pc:docMk/>
             <pc:sldMk cId="2570287448" sldId="315"/>
             <ac:cxnSpMk id="6" creationId="{04925F38-109A-1D6C-957D-46F5D5CE6098}"/>
-          </ac:cxnSpMkLst>
-        </pc:cxnChg>
-        <pc:cxnChg chg="add del">
-          <ac:chgData name="Leila Iñigo de la Cruz" userId="fae4ed0d-52e1-4e8b-ac73-77e0b7235c9a" providerId="ADAL" clId="{1E9E03C1-E5D4-4BEC-8EBD-C4DD5262B379}" dt="2026-09-09T07:05:42.458" v="3657" actId="478"/>
-          <ac:cxnSpMkLst>
-            <pc:docMk/>
-            <pc:sldMk cId="2570287448" sldId="315"/>
-            <ac:cxnSpMk id="9" creationId="{1F2DC8DD-2920-D718-89A5-ACC1DA4CD349}"/>
-          </ac:cxnSpMkLst>
-        </pc:cxnChg>
-        <pc:cxnChg chg="add del mod">
-          <ac:chgData name="Leila Iñigo de la Cruz" userId="fae4ed0d-52e1-4e8b-ac73-77e0b7235c9a" providerId="ADAL" clId="{1E9E03C1-E5D4-4BEC-8EBD-C4DD5262B379}" dt="2026-09-09T07:15:14.488" v="3693" actId="478"/>
-          <ac:cxnSpMkLst>
-            <pc:docMk/>
-            <pc:sldMk cId="2570287448" sldId="315"/>
-            <ac:cxnSpMk id="10" creationId="{A6BF900A-7751-8366-70FF-DA9AE1F30FBA}"/>
           </ac:cxnSpMkLst>
         </pc:cxnChg>
       </pc:sldChg>
@@ -642,210 +443,6 @@
           </ac:spMkLst>
         </pc:spChg>
       </pc:sldChg>
-      <pc:sldChg chg="addSp delSp modSp del mod setBg">
-        <pc:chgData name="Leila Iñigo de la Cruz" userId="fae4ed0d-52e1-4e8b-ac73-77e0b7235c9a" providerId="ADAL" clId="{1E9E03C1-E5D4-4BEC-8EBD-C4DD5262B379}" dt="2026-09-09T09:03:18.103" v="5113" actId="2696"/>
-        <pc:sldMkLst>
-          <pc:docMk/>
-          <pc:sldMk cId="4140464500" sldId="319"/>
-        </pc:sldMkLst>
-        <pc:spChg chg="add mod">
-          <ac:chgData name="Leila Iñigo de la Cruz" userId="fae4ed0d-52e1-4e8b-ac73-77e0b7235c9a" providerId="ADAL" clId="{1E9E03C1-E5D4-4BEC-8EBD-C4DD5262B379}" dt="2026-09-02T12:24:41.135" v="2227" actId="1076"/>
-          <ac:spMkLst>
-            <pc:docMk/>
-            <pc:sldMk cId="4140464500" sldId="319"/>
-            <ac:spMk id="3" creationId="{C7380E69-EFC5-5442-F232-019A551DDB4F}"/>
-          </ac:spMkLst>
-        </pc:spChg>
-        <pc:spChg chg="add mod">
-          <ac:chgData name="Leila Iñigo de la Cruz" userId="fae4ed0d-52e1-4e8b-ac73-77e0b7235c9a" providerId="ADAL" clId="{1E9E03C1-E5D4-4BEC-8EBD-C4DD5262B379}" dt="2026-09-02T12:24:53.776" v="2237" actId="20577"/>
-          <ac:spMkLst>
-            <pc:docMk/>
-            <pc:sldMk cId="4140464500" sldId="319"/>
-            <ac:spMk id="7" creationId="{728A907D-4ACF-1C02-F3C1-021CA8EE0B4F}"/>
-          </ac:spMkLst>
-        </pc:spChg>
-        <pc:spChg chg="add mod">
-          <ac:chgData name="Leila Iñigo de la Cruz" userId="fae4ed0d-52e1-4e8b-ac73-77e0b7235c9a" providerId="ADAL" clId="{1E9E03C1-E5D4-4BEC-8EBD-C4DD5262B379}" dt="2026-09-02T12:24:45.516" v="2228" actId="207"/>
-          <ac:spMkLst>
-            <pc:docMk/>
-            <pc:sldMk cId="4140464500" sldId="319"/>
-            <ac:spMk id="11" creationId="{F63E940E-5F8E-42BA-931F-13A352925335}"/>
-          </ac:spMkLst>
-        </pc:spChg>
-        <pc:spChg chg="add mod">
-          <ac:chgData name="Leila Iñigo de la Cruz" userId="fae4ed0d-52e1-4e8b-ac73-77e0b7235c9a" providerId="ADAL" clId="{1E9E03C1-E5D4-4BEC-8EBD-C4DD5262B379}" dt="2026-09-02T12:24:45.516" v="2228" actId="207"/>
-          <ac:spMkLst>
-            <pc:docMk/>
-            <pc:sldMk cId="4140464500" sldId="319"/>
-            <ac:spMk id="14" creationId="{4AE0127D-5C9E-B371-8941-FB6222C42CF8}"/>
-          </ac:spMkLst>
-        </pc:spChg>
-        <pc:spChg chg="add mod">
-          <ac:chgData name="Leila Iñigo de la Cruz" userId="fae4ed0d-52e1-4e8b-ac73-77e0b7235c9a" providerId="ADAL" clId="{1E9E03C1-E5D4-4BEC-8EBD-C4DD5262B379}" dt="2026-09-02T12:24:45.516" v="2228" actId="207"/>
-          <ac:spMkLst>
-            <pc:docMk/>
-            <pc:sldMk cId="4140464500" sldId="319"/>
-            <ac:spMk id="16" creationId="{9A67BCF1-3109-2458-99BD-1338B306948B}"/>
-          </ac:spMkLst>
-        </pc:spChg>
-        <pc:spChg chg="add mod">
-          <ac:chgData name="Leila Iñigo de la Cruz" userId="fae4ed0d-52e1-4e8b-ac73-77e0b7235c9a" providerId="ADAL" clId="{1E9E03C1-E5D4-4BEC-8EBD-C4DD5262B379}" dt="2026-09-02T12:25:27.424" v="2273" actId="1076"/>
-          <ac:spMkLst>
-            <pc:docMk/>
-            <pc:sldMk cId="4140464500" sldId="319"/>
-            <ac:spMk id="31" creationId="{1CA2BE2B-1C55-F54C-4975-769DDD8EAB42}"/>
-          </ac:spMkLst>
-        </pc:spChg>
-        <pc:spChg chg="add mod">
-          <ac:chgData name="Leila Iñigo de la Cruz" userId="fae4ed0d-52e1-4e8b-ac73-77e0b7235c9a" providerId="ADAL" clId="{1E9E03C1-E5D4-4BEC-8EBD-C4DD5262B379}" dt="2026-09-02T12:25:48.272" v="2313" actId="1076"/>
-          <ac:spMkLst>
-            <pc:docMk/>
-            <pc:sldMk cId="4140464500" sldId="319"/>
-            <ac:spMk id="33" creationId="{349BF5FD-4101-C7C1-61A1-D6DBEED643D1}"/>
-          </ac:spMkLst>
-        </pc:spChg>
-        <pc:spChg chg="add mod">
-          <ac:chgData name="Leila Iñigo de la Cruz" userId="fae4ed0d-52e1-4e8b-ac73-77e0b7235c9a" providerId="ADAL" clId="{1E9E03C1-E5D4-4BEC-8EBD-C4DD5262B379}" dt="2026-09-02T12:26:14.432" v="2382" actId="20577"/>
-          <ac:spMkLst>
-            <pc:docMk/>
-            <pc:sldMk cId="4140464500" sldId="319"/>
-            <ac:spMk id="35" creationId="{B384E562-10D6-6D95-FADB-AAA793670F20}"/>
-          </ac:spMkLst>
-        </pc:spChg>
-        <pc:spChg chg="add mod">
-          <ac:chgData name="Leila Iñigo de la Cruz" userId="fae4ed0d-52e1-4e8b-ac73-77e0b7235c9a" providerId="ADAL" clId="{1E9E03C1-E5D4-4BEC-8EBD-C4DD5262B379}" dt="2026-09-02T12:27:05.681" v="2516" actId="20577"/>
-          <ac:spMkLst>
-            <pc:docMk/>
-            <pc:sldMk cId="4140464500" sldId="319"/>
-            <ac:spMk id="37" creationId="{0156595A-28B2-EC9D-F088-FFC0A88C35D4}"/>
-          </ac:spMkLst>
-        </pc:spChg>
-        <pc:cxnChg chg="add mod">
-          <ac:chgData name="Leila Iñigo de la Cruz" userId="fae4ed0d-52e1-4e8b-ac73-77e0b7235c9a" providerId="ADAL" clId="{1E9E03C1-E5D4-4BEC-8EBD-C4DD5262B379}" dt="2026-09-02T12:24:41.135" v="2227" actId="1076"/>
-          <ac:cxnSpMkLst>
-            <pc:docMk/>
-            <pc:sldMk cId="4140464500" sldId="319"/>
-            <ac:cxnSpMk id="5" creationId="{2F5C9548-AEC9-A5FF-EAEC-40F8C8498F9F}"/>
-          </ac:cxnSpMkLst>
-        </pc:cxnChg>
-        <pc:cxnChg chg="add mod">
-          <ac:chgData name="Leila Iñigo de la Cruz" userId="fae4ed0d-52e1-4e8b-ac73-77e0b7235c9a" providerId="ADAL" clId="{1E9E03C1-E5D4-4BEC-8EBD-C4DD5262B379}" dt="2026-09-02T12:24:41.135" v="2227" actId="1076"/>
-          <ac:cxnSpMkLst>
-            <pc:docMk/>
-            <pc:sldMk cId="4140464500" sldId="319"/>
-            <ac:cxnSpMk id="18" creationId="{5C2F2ED9-EDD1-735E-0FDB-14220434A035}"/>
-          </ac:cxnSpMkLst>
-        </pc:cxnChg>
-        <pc:cxnChg chg="add mod">
-          <ac:chgData name="Leila Iñigo de la Cruz" userId="fae4ed0d-52e1-4e8b-ac73-77e0b7235c9a" providerId="ADAL" clId="{1E9E03C1-E5D4-4BEC-8EBD-C4DD5262B379}" dt="2026-09-02T12:24:41.135" v="2227" actId="1076"/>
-          <ac:cxnSpMkLst>
-            <pc:docMk/>
-            <pc:sldMk cId="4140464500" sldId="319"/>
-            <ac:cxnSpMk id="20" creationId="{1E24823D-0B44-4908-806E-4C29BA60D303}"/>
-          </ac:cxnSpMkLst>
-        </pc:cxnChg>
-        <pc:cxnChg chg="add mod">
-          <ac:chgData name="Leila Iñigo de la Cruz" userId="fae4ed0d-52e1-4e8b-ac73-77e0b7235c9a" providerId="ADAL" clId="{1E9E03C1-E5D4-4BEC-8EBD-C4DD5262B379}" dt="2026-09-02T12:24:41.135" v="2227" actId="1076"/>
-          <ac:cxnSpMkLst>
-            <pc:docMk/>
-            <pc:sldMk cId="4140464500" sldId="319"/>
-            <ac:cxnSpMk id="22" creationId="{713ED0A5-23FC-1444-F5BA-04182DD30FD5}"/>
-          </ac:cxnSpMkLst>
-        </pc:cxnChg>
-      </pc:sldChg>
-      <pc:sldChg chg="addSp delSp modSp del mod setBg delAnim modAnim">
-        <pc:chgData name="Leila Iñigo de la Cruz" userId="fae4ed0d-52e1-4e8b-ac73-77e0b7235c9a" providerId="ADAL" clId="{1E9E03C1-E5D4-4BEC-8EBD-C4DD5262B379}" dt="2026-09-09T09:03:22.153" v="5114" actId="2696"/>
-        <pc:sldMkLst>
-          <pc:docMk/>
-          <pc:sldMk cId="3618825932" sldId="320"/>
-        </pc:sldMkLst>
-        <pc:spChg chg="add mod">
-          <ac:chgData name="Leila Iñigo de la Cruz" userId="fae4ed0d-52e1-4e8b-ac73-77e0b7235c9a" providerId="ADAL" clId="{1E9E03C1-E5D4-4BEC-8EBD-C4DD5262B379}" dt="2026-09-02T12:29:57.952" v="2673" actId="1076"/>
-          <ac:spMkLst>
-            <pc:docMk/>
-            <pc:sldMk cId="3618825932" sldId="320"/>
-            <ac:spMk id="4" creationId="{7FA9632B-0395-4D90-A1EB-C273B8EB740C}"/>
-          </ac:spMkLst>
-        </pc:spChg>
-        <pc:spChg chg="add mod">
-          <ac:chgData name="Leila Iñigo de la Cruz" userId="fae4ed0d-52e1-4e8b-ac73-77e0b7235c9a" providerId="ADAL" clId="{1E9E03C1-E5D4-4BEC-8EBD-C4DD5262B379}" dt="2026-09-02T12:35:28.328" v="3134" actId="20577"/>
-          <ac:spMkLst>
-            <pc:docMk/>
-            <pc:sldMk cId="3618825932" sldId="320"/>
-            <ac:spMk id="5" creationId="{3AA6A5A6-9EAD-3B14-049D-D085D5419597}"/>
-          </ac:spMkLst>
-        </pc:spChg>
-        <pc:spChg chg="mod">
-          <ac:chgData name="Leila Iñigo de la Cruz" userId="fae4ed0d-52e1-4e8b-ac73-77e0b7235c9a" providerId="ADAL" clId="{1E9E03C1-E5D4-4BEC-8EBD-C4DD5262B379}" dt="2026-09-02T12:27:45.712" v="2550" actId="20577"/>
-          <ac:spMkLst>
-            <pc:docMk/>
-            <pc:sldMk cId="3618825932" sldId="320"/>
-            <ac:spMk id="9" creationId="{D4C1D7B2-C296-81C1-E88D-3DCB8A977DF9}"/>
-          </ac:spMkLst>
-        </pc:spChg>
-      </pc:sldChg>
-      <pc:sldChg chg="addSp delSp modSp del mod setBg">
-        <pc:chgData name="Leila Iñigo de la Cruz" userId="fae4ed0d-52e1-4e8b-ac73-77e0b7235c9a" providerId="ADAL" clId="{1E9E03C1-E5D4-4BEC-8EBD-C4DD5262B379}" dt="2026-09-09T09:04:22.911" v="5119" actId="2696"/>
-        <pc:sldMkLst>
-          <pc:docMk/>
-          <pc:sldMk cId="2355097140" sldId="321"/>
-        </pc:sldMkLst>
-        <pc:spChg chg="add mod">
-          <ac:chgData name="Leila Iñigo de la Cruz" userId="fae4ed0d-52e1-4e8b-ac73-77e0b7235c9a" providerId="ADAL" clId="{1E9E03C1-E5D4-4BEC-8EBD-C4DD5262B379}" dt="2026-09-02T12:47:17.511" v="3511" actId="207"/>
-          <ac:spMkLst>
-            <pc:docMk/>
-            <pc:sldMk cId="2355097140" sldId="321"/>
-            <ac:spMk id="2" creationId="{A18961A7-563A-0505-67F0-E20C876BFA4F}"/>
-          </ac:spMkLst>
-        </pc:spChg>
-        <pc:spChg chg="mod">
-          <ac:chgData name="Leila Iñigo de la Cruz" userId="fae4ed0d-52e1-4e8b-ac73-77e0b7235c9a" providerId="ADAL" clId="{1E9E03C1-E5D4-4BEC-8EBD-C4DD5262B379}" dt="2026-09-02T12:44:05.469" v="3462" actId="20577"/>
-          <ac:spMkLst>
-            <pc:docMk/>
-            <pc:sldMk cId="2355097140" sldId="321"/>
-            <ac:spMk id="3" creationId="{93A483DC-45C7-5773-0E65-5F098CD3869A}"/>
-          </ac:spMkLst>
-        </pc:spChg>
-        <pc:spChg chg="add mod">
-          <ac:chgData name="Leila Iñigo de la Cruz" userId="fae4ed0d-52e1-4e8b-ac73-77e0b7235c9a" providerId="ADAL" clId="{1E9E03C1-E5D4-4BEC-8EBD-C4DD5262B379}" dt="2026-09-02T12:46:55.924" v="3479" actId="1076"/>
-          <ac:spMkLst>
-            <pc:docMk/>
-            <pc:sldMk cId="2355097140" sldId="321"/>
-            <ac:spMk id="5" creationId="{978CC4A1-A095-871F-063C-594177E65235}"/>
-          </ac:spMkLst>
-        </pc:spChg>
-      </pc:sldChg>
-      <pc:sldChg chg="addSp delSp modSp add del mod setBg">
-        <pc:chgData name="Leila Iñigo de la Cruz" userId="fae4ed0d-52e1-4e8b-ac73-77e0b7235c9a" providerId="ADAL" clId="{1E9E03C1-E5D4-4BEC-8EBD-C4DD5262B379}" dt="2026-09-09T09:03:12.803" v="5112" actId="2696"/>
-        <pc:sldMkLst>
-          <pc:docMk/>
-          <pc:sldMk cId="3584046850" sldId="327"/>
-        </pc:sldMkLst>
-        <pc:spChg chg="mod">
-          <ac:chgData name="Leila Iñigo de la Cruz" userId="fae4ed0d-52e1-4e8b-ac73-77e0b7235c9a" providerId="ADAL" clId="{1E9E03C1-E5D4-4BEC-8EBD-C4DD5262B379}" dt="2026-09-02T12:17:41.505" v="1959" actId="1076"/>
-          <ac:spMkLst>
-            <pc:docMk/>
-            <pc:sldMk cId="3584046850" sldId="327"/>
-            <ac:spMk id="10" creationId="{183F900B-B385-E14C-C3D2-9844F6946E8A}"/>
-          </ac:spMkLst>
-        </pc:spChg>
-        <pc:spChg chg="add mod">
-          <ac:chgData name="Leila Iñigo de la Cruz" userId="fae4ed0d-52e1-4e8b-ac73-77e0b7235c9a" providerId="ADAL" clId="{1E9E03C1-E5D4-4BEC-8EBD-C4DD5262B379}" dt="2026-09-02T12:21:10.024" v="2134" actId="1076"/>
-          <ac:spMkLst>
-            <pc:docMk/>
-            <pc:sldMk cId="3584046850" sldId="327"/>
-            <ac:spMk id="15" creationId="{93B87D85-1E23-7173-A5BC-7CF4ADCBE744}"/>
-          </ac:spMkLst>
-        </pc:spChg>
-        <pc:cxnChg chg="add mod">
-          <ac:chgData name="Leila Iñigo de la Cruz" userId="fae4ed0d-52e1-4e8b-ac73-77e0b7235c9a" providerId="ADAL" clId="{1E9E03C1-E5D4-4BEC-8EBD-C4DD5262B379}" dt="2026-09-02T12:17:46.181" v="1961" actId="13822"/>
-          <ac:cxnSpMkLst>
-            <pc:docMk/>
-            <pc:sldMk cId="3584046850" sldId="327"/>
-            <ac:cxnSpMk id="11" creationId="{3A51EBF1-AC76-5EBE-51E1-2FA5407C340D}"/>
-          </ac:cxnSpMkLst>
-        </pc:cxnChg>
-      </pc:sldChg>
       <pc:sldChg chg="add">
         <pc:chgData name="Leila Iñigo de la Cruz" userId="fae4ed0d-52e1-4e8b-ac73-77e0b7235c9a" providerId="ADAL" clId="{1E9E03C1-E5D4-4BEC-8EBD-C4DD5262B379}" dt="2026-09-09T07:15:08.963" v="3692" actId="2890"/>
         <pc:sldMkLst>
@@ -865,14 +462,6 @@
             <pc:docMk/>
             <pc:sldMk cId="2130596566" sldId="329"/>
             <ac:spMk id="2" creationId="{C919362F-EA11-960B-E4A8-72BE526E4488}"/>
-          </ac:spMkLst>
-        </pc:spChg>
-        <pc:spChg chg="del mod">
-          <ac:chgData name="Leila Iñigo de la Cruz" userId="fae4ed0d-52e1-4e8b-ac73-77e0b7235c9a" providerId="ADAL" clId="{1E9E03C1-E5D4-4BEC-8EBD-C4DD5262B379}" dt="2026-09-09T07:43:44.510" v="3917" actId="478"/>
-          <ac:spMkLst>
-            <pc:docMk/>
-            <pc:sldMk cId="2130596566" sldId="329"/>
-            <ac:spMk id="3" creationId="{79C06495-DF11-B677-8555-BFD13F1A5F85}"/>
           </ac:spMkLst>
         </pc:spChg>
         <pc:spChg chg="add mod">
@@ -897,14 +486,6 @@
             <pc:docMk/>
             <pc:sldMk cId="2130596566" sldId="329"/>
             <ac:spMk id="9" creationId="{5D85B144-9160-1BF0-90CF-8CE024D0214F}"/>
-          </ac:spMkLst>
-        </pc:spChg>
-        <pc:spChg chg="del mod">
-          <ac:chgData name="Leila Iñigo de la Cruz" userId="fae4ed0d-52e1-4e8b-ac73-77e0b7235c9a" providerId="ADAL" clId="{1E9E03C1-E5D4-4BEC-8EBD-C4DD5262B379}" dt="2026-09-09T07:43:45.694" v="3918" actId="478"/>
-          <ac:spMkLst>
-            <pc:docMk/>
-            <pc:sldMk cId="2130596566" sldId="329"/>
-            <ac:spMk id="15" creationId="{2FA1117C-FE43-D443-AF31-3753D3667C1A}"/>
           </ac:spMkLst>
         </pc:spChg>
         <pc:spChg chg="mod">
@@ -994,22 +575,6 @@
             <ac:spMk id="22" creationId="{B458D167-7E93-32B5-E827-2C78BAA245FE}"/>
           </ac:spMkLst>
         </pc:spChg>
-        <pc:spChg chg="del">
-          <ac:chgData name="Leila Iñigo de la Cruz" userId="fae4ed0d-52e1-4e8b-ac73-77e0b7235c9a" providerId="ADAL" clId="{1E9E03C1-E5D4-4BEC-8EBD-C4DD5262B379}" dt="2026-09-09T08:16:43.952" v="4900" actId="478"/>
-          <ac:spMkLst>
-            <pc:docMk/>
-            <pc:sldMk cId="904388668" sldId="330"/>
-            <ac:spMk id="159" creationId="{134733F8-3ADE-BE6B-2E51-623A75AD60CB}"/>
-          </ac:spMkLst>
-        </pc:spChg>
-        <pc:grpChg chg="add mod">
-          <ac:chgData name="Leila Iñigo de la Cruz" userId="fae4ed0d-52e1-4e8b-ac73-77e0b7235c9a" providerId="ADAL" clId="{1E9E03C1-E5D4-4BEC-8EBD-C4DD5262B379}" dt="2026-09-09T08:17:58.830" v="4906" actId="164"/>
-          <ac:grpSpMkLst>
-            <pc:docMk/>
-            <pc:sldMk cId="904388668" sldId="330"/>
-            <ac:grpSpMk id="23" creationId="{697A9E8A-3AAB-3769-B75E-836542D59B46}"/>
-          </ac:grpSpMkLst>
-        </pc:grpChg>
         <pc:cxnChg chg="add mod">
           <ac:chgData name="Leila Iñigo de la Cruz" userId="fae4ed0d-52e1-4e8b-ac73-77e0b7235c9a" providerId="ADAL" clId="{1E9E03C1-E5D4-4BEC-8EBD-C4DD5262B379}" dt="2026-09-09T08:17:58.830" v="4906" actId="164"/>
           <ac:cxnSpMkLst>
@@ -1043,27 +608,12 @@
           </ac:cxnSpMkLst>
         </pc:cxnChg>
       </pc:sldChg>
-      <pc:sldChg chg="add del">
-        <pc:chgData name="Leila Iñigo de la Cruz" userId="fae4ed0d-52e1-4e8b-ac73-77e0b7235c9a" providerId="ADAL" clId="{1E9E03C1-E5D4-4BEC-8EBD-C4DD5262B379}" dt="2026-09-09T09:00:56.729" v="5099" actId="2696"/>
-        <pc:sldMkLst>
-          <pc:docMk/>
-          <pc:sldMk cId="1435471591" sldId="331"/>
-        </pc:sldMkLst>
-      </pc:sldChg>
       <pc:sldChg chg="addSp delSp modSp add mod">
         <pc:chgData name="Leila Iñigo de la Cruz" userId="fae4ed0d-52e1-4e8b-ac73-77e0b7235c9a" providerId="ADAL" clId="{1E9E03C1-E5D4-4BEC-8EBD-C4DD5262B379}" dt="2026-09-09T08:59:51.444" v="5098" actId="20577"/>
         <pc:sldMkLst>
           <pc:docMk/>
           <pc:sldMk cId="665183601" sldId="332"/>
         </pc:sldMkLst>
-        <pc:spChg chg="add del mod">
-          <ac:chgData name="Leila Iñigo de la Cruz" userId="fae4ed0d-52e1-4e8b-ac73-77e0b7235c9a" providerId="ADAL" clId="{1E9E03C1-E5D4-4BEC-8EBD-C4DD5262B379}" dt="2026-09-09T08:58:32.874" v="5057" actId="478"/>
-          <ac:spMkLst>
-            <pc:docMk/>
-            <pc:sldMk cId="665183601" sldId="332"/>
-            <ac:spMk id="2" creationId="{6B8C0C91-7352-3E7E-C30A-108CABAF40B8}"/>
-          </ac:spMkLst>
-        </pc:spChg>
         <pc:spChg chg="add mod">
           <ac:chgData name="Leila Iñigo de la Cruz" userId="fae4ed0d-52e1-4e8b-ac73-77e0b7235c9a" providerId="ADAL" clId="{1E9E03C1-E5D4-4BEC-8EBD-C4DD5262B379}" dt="2026-09-09T08:59:51.444" v="5098" actId="20577"/>
           <ac:spMkLst>
@@ -1078,14 +628,6 @@
             <pc:docMk/>
             <pc:sldMk cId="665183601" sldId="332"/>
             <ac:spMk id="5" creationId="{7F231352-828B-906A-6BD5-74F7AF552ED0}"/>
-          </ac:spMkLst>
-        </pc:spChg>
-        <pc:spChg chg="del">
-          <ac:chgData name="Leila Iñigo de la Cruz" userId="fae4ed0d-52e1-4e8b-ac73-77e0b7235c9a" providerId="ADAL" clId="{1E9E03C1-E5D4-4BEC-8EBD-C4DD5262B379}" dt="2026-09-09T08:22:52.803" v="5027" actId="478"/>
-          <ac:spMkLst>
-            <pc:docMk/>
-            <pc:sldMk cId="665183601" sldId="332"/>
-            <ac:spMk id="7" creationId="{5064DA39-6DD8-76D4-44C8-236858B00448}"/>
           </ac:spMkLst>
         </pc:spChg>
       </pc:sldChg>
@@ -1109,6 +651,21 @@
             <pc:docMk/>
             <pc:sldMk cId="3797427573" sldId="333"/>
             <ac:spMk id="6" creationId="{55DFA5F6-78C6-906A-E5F6-8F81FF599D8D}"/>
+          </ac:spMkLst>
+        </pc:spChg>
+      </pc:sldChg>
+      <pc:sldChg chg="modSp add mod">
+        <pc:chgData name="Leila Iñigo de la Cruz" userId="fae4ed0d-52e1-4e8b-ac73-77e0b7235c9a" providerId="ADAL" clId="{1E9E03C1-E5D4-4BEC-8EBD-C4DD5262B379}" dt="2026-09-23T08:18:37.589" v="5123" actId="1076"/>
+        <pc:sldMkLst>
+          <pc:docMk/>
+          <pc:sldMk cId="191692488" sldId="334"/>
+        </pc:sldMkLst>
+        <pc:spChg chg="mod">
+          <ac:chgData name="Leila Iñigo de la Cruz" userId="fae4ed0d-52e1-4e8b-ac73-77e0b7235c9a" providerId="ADAL" clId="{1E9E03C1-E5D4-4BEC-8EBD-C4DD5262B379}" dt="2026-09-23T08:18:37.589" v="5123" actId="1076"/>
+          <ac:spMkLst>
+            <pc:docMk/>
+            <pc:sldMk cId="191692488" sldId="334"/>
+            <ac:spMk id="2" creationId="{BB3CD88F-9F93-08C4-D9F7-71F4074EAC3A}"/>
           </ac:spMkLst>
         </pc:spChg>
       </pc:sldChg>
@@ -1294,7 +851,7 @@
           <a:p>
             <a:fld id="{4CDBE7BC-106D-4B03-9183-ECAC3B45AFC3}" type="datetimeFigureOut">
               <a:rPr lang="nl-NL" smtClean="0"/>
-              <a:t>9-9-2026</a:t>
+              <a:t>23-9-2026</a:t>
             </a:fld>
             <a:endParaRPr lang="nl-NL"/>
           </a:p>
@@ -9265,7 +8822,7 @@
           <a:p>
             <a:fld id="{6FB2F65A-CA80-4036-A1DE-2EDF1F345BB4}" type="datetimeFigureOut">
               <a:rPr lang="en-GB" smtClean="0"/>
-              <a:t>09/09/2026</a:t>
+              <a:t>23/09/2026</a:t>
             </a:fld>
             <a:endParaRPr lang="en-GB"/>
           </a:p>
@@ -17161,7 +16718,7 @@
           <a:p>
             <a:fld id="{6FB2F65A-CA80-4036-A1DE-2EDF1F345BB4}" type="datetimeFigureOut">
               <a:rPr lang="en-GB" smtClean="0"/>
-              <a:t>09/09/2026</a:t>
+              <a:t>23/09/2026</a:t>
             </a:fld>
             <a:endParaRPr lang="en-GB"/>
           </a:p>
@@ -17331,7 +16888,7 @@
           <a:p>
             <a:fld id="{6FB2F65A-CA80-4036-A1DE-2EDF1F345BB4}" type="datetimeFigureOut">
               <a:rPr lang="en-GB" smtClean="0"/>
-              <a:t>09/09/2026</a:t>
+              <a:t>23/09/2026</a:t>
             </a:fld>
             <a:endParaRPr lang="en-GB"/>
           </a:p>
@@ -22958,15 +22515,23 @@
             <a:p>
               <a:pPr algn="ctr"/>
               <a:r>
-                <a:rPr lang="nl-NL" dirty="0" err="1">
+                <a:rPr lang="nl-NL" b="1" dirty="0">
                   <a:solidFill>
                     <a:schemeClr val="tx1"/>
                   </a:solidFill>
                 </a:rPr>
-                <a:t>Can</a:t>
+                <a:t>How </a:t>
               </a:r>
               <a:r>
-                <a:rPr lang="nl-NL" dirty="0">
+                <a:rPr lang="nl-NL" b="1" dirty="0" err="1">
+                  <a:solidFill>
+                    <a:schemeClr val="tx1"/>
+                  </a:solidFill>
+                </a:rPr>
+                <a:t>can</a:t>
+              </a:r>
+              <a:r>
+                <a:rPr lang="nl-NL" b="1" dirty="0">
                   <a:solidFill>
                     <a:schemeClr val="tx1"/>
                   </a:solidFill>
@@ -22974,63 +22539,31 @@
                 <a:t> </a:t>
               </a:r>
               <a:r>
-                <a:rPr lang="nl-NL" dirty="0" err="1">
+                <a:rPr lang="nl-NL" b="1" dirty="0" err="1">
                   <a:solidFill>
                     <a:schemeClr val="tx1"/>
                   </a:solidFill>
                 </a:rPr>
-                <a:t>other</a:t>
+                <a:t>one</a:t>
               </a:r>
               <a:r>
-                <a:rPr lang="nl-NL" dirty="0">
+                <a:rPr lang="nl-NL" b="1" dirty="0">
                   <a:solidFill>
                     <a:schemeClr val="tx1"/>
                   </a:solidFill>
                 </a:rPr>
-                <a:t> systems access </a:t>
+                <a:t> computer system access data held </a:t>
               </a:r>
               <a:r>
-                <a:rPr lang="nl-NL" dirty="0" err="1">
+                <a:rPr lang="nl-NL" b="1" dirty="0" err="1">
                   <a:solidFill>
                     <a:schemeClr val="tx1"/>
                   </a:solidFill>
                 </a:rPr>
-                <a:t>and</a:t>
+                <a:t>by</a:t>
               </a:r>
               <a:r>
-                <a:rPr lang="nl-NL" dirty="0">
-                  <a:solidFill>
-                    <a:schemeClr val="tx1"/>
-                  </a:solidFill>
-                </a:rPr>
-                <a:t> exchange </a:t>
-              </a:r>
-              <a:r>
-                <a:rPr lang="nl-NL" dirty="0" err="1">
-                  <a:solidFill>
-                    <a:schemeClr val="tx1"/>
-                  </a:solidFill>
-                </a:rPr>
-                <a:t>the</a:t>
-              </a:r>
-              <a:r>
-                <a:rPr lang="nl-NL" dirty="0">
-                  <a:solidFill>
-                    <a:schemeClr val="tx1"/>
-                  </a:solidFill>
-                </a:rPr>
-                <a:t> data </a:t>
-              </a:r>
-              <a:r>
-                <a:rPr lang="nl-NL" dirty="0" err="1">
-                  <a:solidFill>
-                    <a:schemeClr val="tx1"/>
-                  </a:solidFill>
-                </a:rPr>
-                <a:t>automatically</a:t>
-              </a:r>
-              <a:r>
-                <a:rPr lang="nl-NL" dirty="0">
+                <a:rPr lang="nl-NL" b="1" dirty="0">
                   <a:solidFill>
                     <a:schemeClr val="tx1"/>
                   </a:solidFill>
@@ -23038,67 +22571,260 @@
                 <a:t> </a:t>
               </a:r>
               <a:r>
-                <a:rPr lang="nl-NL" dirty="0" err="1">
+                <a:rPr lang="nl-NL" b="1" dirty="0" err="1">
                   <a:solidFill>
                     <a:schemeClr val="tx1"/>
                   </a:solidFill>
                 </a:rPr>
-                <a:t>using</a:t>
+                <a:t>another</a:t>
               </a:r>
               <a:r>
-                <a:rPr lang="nl-NL" dirty="0">
+                <a:rPr lang="nl-NL" b="1" dirty="0">
                   <a:solidFill>
                     <a:schemeClr val="tx1"/>
                   </a:solidFill>
                 </a:rPr>
-                <a:t> standard interfaces </a:t>
+                <a:t> system?</a:t>
               </a:r>
-              <a:r>
-                <a:rPr lang="nl-NL" dirty="0" err="1">
-                  <a:solidFill>
-                    <a:schemeClr val="tx1"/>
-                  </a:solidFill>
-                </a:rPr>
-                <a:t>and</a:t>
-              </a:r>
-              <a:r>
-                <a:rPr lang="nl-NL" dirty="0">
-                  <a:solidFill>
-                    <a:schemeClr val="tx1"/>
-                  </a:solidFill>
-                </a:rPr>
-                <a:t> </a:t>
-              </a:r>
-              <a:r>
-                <a:rPr lang="nl-NL" dirty="0" err="1">
-                  <a:solidFill>
-                    <a:schemeClr val="tx1"/>
-                  </a:solidFill>
-                </a:rPr>
-                <a:t>protocols</a:t>
-              </a:r>
-              <a:r>
-                <a:rPr lang="nl-NL" dirty="0">
-                  <a:solidFill>
-                    <a:schemeClr val="tx1"/>
-                  </a:solidFill>
-                </a:rPr>
-                <a:t>?</a:t>
-              </a:r>
+              <a:endParaRPr lang="nl-NL" dirty="0">
+                <a:solidFill>
+                  <a:schemeClr val="tx1"/>
+                </a:solidFill>
+              </a:endParaRPr>
             </a:p>
           </p:txBody>
         </p:sp>
       </p:grpSp>
+      <p:sp>
+        <p:nvSpPr>
+          <p:cNvPr id="2" name="Rectangle: Rounded Corners 1">
+            <a:extLst>
+              <a:ext uri="{FF2B5EF4-FFF2-40B4-BE49-F238E27FC236}">
+                <a16:creationId xmlns:a16="http://schemas.microsoft.com/office/drawing/2014/main" id="{BB3CD88F-9F93-08C4-D9F7-71F4074EAC3A}"/>
+              </a:ext>
+            </a:extLst>
+          </p:cNvPr>
+          <p:cNvSpPr/>
+          <p:nvPr/>
+        </p:nvSpPr>
+        <p:spPr>
+          <a:xfrm>
+            <a:off x="1967696" y="4476629"/>
+            <a:ext cx="7014259" cy="914400"/>
+          </a:xfrm>
+          <a:prstGeom prst="roundRect">
+            <a:avLst/>
+          </a:prstGeom>
+        </p:spPr>
+        <p:style>
+          <a:lnRef idx="2">
+            <a:schemeClr val="accent4">
+              <a:shade val="15000"/>
+            </a:schemeClr>
+          </a:lnRef>
+          <a:fillRef idx="1">
+            <a:schemeClr val="accent4"/>
+          </a:fillRef>
+          <a:effectRef idx="0">
+            <a:schemeClr val="accent4"/>
+          </a:effectRef>
+          <a:fontRef idx="minor">
+            <a:schemeClr val="lt1"/>
+          </a:fontRef>
+        </p:style>
+        <p:txBody>
+          <a:bodyPr rtlCol="0" anchor="ctr"/>
+          <a:lstStyle/>
+          <a:p>
+            <a:pPr algn="ctr"/>
+            <a:r>
+              <a:rPr lang="nl-NL" dirty="0"/>
+              <a:t>How </a:t>
+            </a:r>
+            <a:r>
+              <a:rPr lang="nl-NL" dirty="0" err="1"/>
+              <a:t>can</a:t>
+            </a:r>
+            <a:r>
+              <a:rPr lang="nl-NL" dirty="0"/>
+              <a:t> software </a:t>
+            </a:r>
+            <a:r>
+              <a:rPr lang="nl-NL" dirty="0" err="1"/>
+              <a:t>interact</a:t>
+            </a:r>
+            <a:r>
+              <a:rPr lang="nl-NL" dirty="0"/>
+              <a:t> </a:t>
+            </a:r>
+            <a:r>
+              <a:rPr lang="nl-NL" dirty="0" err="1"/>
+              <a:t>programmatically</a:t>
+            </a:r>
+            <a:r>
+              <a:rPr lang="nl-NL" dirty="0"/>
+              <a:t> </a:t>
+            </a:r>
+            <a:r>
+              <a:rPr lang="nl-NL" dirty="0" err="1"/>
+              <a:t>with</a:t>
+            </a:r>
+            <a:r>
+              <a:rPr lang="nl-NL" dirty="0"/>
+              <a:t> </a:t>
+            </a:r>
+            <a:r>
+              <a:rPr lang="nl-NL" dirty="0" err="1"/>
+              <a:t>the</a:t>
+            </a:r>
+            <a:r>
+              <a:rPr lang="nl-NL" dirty="0"/>
+              <a:t> </a:t>
+            </a:r>
+            <a:r>
+              <a:rPr lang="nl-NL" dirty="0" err="1"/>
+              <a:t>functions</a:t>
+            </a:r>
+            <a:r>
+              <a:rPr lang="nl-NL" dirty="0"/>
+              <a:t> </a:t>
+            </a:r>
+            <a:r>
+              <a:rPr lang="nl-NL" dirty="0" err="1"/>
+              <a:t>and</a:t>
+            </a:r>
+            <a:r>
+              <a:rPr lang="nl-NL" dirty="0"/>
+              <a:t> resources </a:t>
+            </a:r>
+            <a:r>
+              <a:rPr lang="nl-NL" dirty="0" err="1"/>
+              <a:t>provided</a:t>
+            </a:r>
+            <a:r>
+              <a:rPr lang="nl-NL" dirty="0"/>
+              <a:t> </a:t>
+            </a:r>
+            <a:r>
+              <a:rPr lang="nl-NL" dirty="0" err="1"/>
+              <a:t>by</a:t>
+            </a:r>
+            <a:r>
+              <a:rPr lang="nl-NL" dirty="0"/>
+              <a:t> </a:t>
+            </a:r>
+            <a:r>
+              <a:rPr lang="nl-NL" dirty="0" err="1"/>
+              <a:t>another</a:t>
+            </a:r>
+            <a:r>
+              <a:rPr lang="nl-NL" dirty="0"/>
+              <a:t> system?</a:t>
+            </a:r>
+            <a:endParaRPr lang="nl-NL" dirty="0">
+              <a:solidFill>
+                <a:schemeClr val="tx1"/>
+              </a:solidFill>
+            </a:endParaRPr>
+          </a:p>
+        </p:txBody>
+      </p:sp>
     </p:spTree>
     <p:extLst>
       <p:ext uri="{BB962C8B-B14F-4D97-AF65-F5344CB8AC3E}">
-        <p14:creationId xmlns:p14="http://schemas.microsoft.com/office/powerpoint/2010/main" val="3544987058"/>
+        <p14:creationId xmlns:p14="http://schemas.microsoft.com/office/powerpoint/2010/main" val="191692488"/>
       </p:ext>
     </p:extLst>
   </p:cSld>
   <p:clrMapOvr>
     <a:masterClrMapping/>
   </p:clrMapOvr>
+  <p:timing>
+    <p:tnLst>
+      <p:par>
+        <p:cTn id="1" dur="indefinite" restart="never" nodeType="tmRoot">
+          <p:childTnLst>
+            <p:seq concurrent="1" nextAc="seek">
+              <p:cTn id="2" dur="indefinite" nodeType="mainSeq">
+                <p:childTnLst>
+                  <p:par>
+                    <p:cTn id="3" fill="hold">
+                      <p:stCondLst>
+                        <p:cond delay="indefinite"/>
+                      </p:stCondLst>
+                      <p:childTnLst>
+                        <p:par>
+                          <p:cTn id="4" fill="hold">
+                            <p:stCondLst>
+                              <p:cond delay="0"/>
+                            </p:stCondLst>
+                            <p:childTnLst>
+                              <p:par>
+                                <p:cTn id="5" presetID="10" presetClass="entr" presetSubtype="0" fill="hold" grpId="0" nodeType="clickEffect">
+                                  <p:stCondLst>
+                                    <p:cond delay="0"/>
+                                  </p:stCondLst>
+                                  <p:childTnLst>
+                                    <p:set>
+                                      <p:cBhvr>
+                                        <p:cTn id="6" dur="1" fill="hold">
+                                          <p:stCondLst>
+                                            <p:cond delay="0"/>
+                                          </p:stCondLst>
+                                        </p:cTn>
+                                        <p:tgtEl>
+                                          <p:spTgt spid="2"/>
+                                        </p:tgtEl>
+                                        <p:attrNameLst>
+                                          <p:attrName>style.visibility</p:attrName>
+                                        </p:attrNameLst>
+                                      </p:cBhvr>
+                                      <p:to>
+                                        <p:strVal val="visible"/>
+                                      </p:to>
+                                    </p:set>
+                                    <p:animEffect transition="in" filter="fade">
+                                      <p:cBhvr>
+                                        <p:cTn id="7" dur="500"/>
+                                        <p:tgtEl>
+                                          <p:spTgt spid="2"/>
+                                        </p:tgtEl>
+                                      </p:cBhvr>
+                                    </p:animEffect>
+                                  </p:childTnLst>
+                                </p:cTn>
+                              </p:par>
+                            </p:childTnLst>
+                          </p:cTn>
+                        </p:par>
+                      </p:childTnLst>
+                    </p:cTn>
+                  </p:par>
+                </p:childTnLst>
+              </p:cTn>
+              <p:prevCondLst>
+                <p:cond evt="onPrev" delay="0">
+                  <p:tgtEl>
+                    <p:sldTgt/>
+                  </p:tgtEl>
+                </p:cond>
+              </p:prevCondLst>
+              <p:nextCondLst>
+                <p:cond evt="onNext" delay="0">
+                  <p:tgtEl>
+                    <p:sldTgt/>
+                  </p:tgtEl>
+                </p:cond>
+              </p:nextCondLst>
+            </p:seq>
+          </p:childTnLst>
+        </p:cTn>
+      </p:par>
+    </p:tnLst>
+    <p:bldLst>
+      <p:bldP spid="2" grpId="0" animBg="1"/>
+    </p:bldLst>
+  </p:timing>
 </p:sld>
 </file>
 
